--- a/Take-home_Ex/Take-home_Ex02/UI Introduction.pptx
+++ b/Take-home_Ex/Take-home_Ex02/UI Introduction.pptx
@@ -11,6 +11,10 @@
     <p:sldId id="259" r:id="rId5"/>
     <p:sldId id="260" r:id="rId6"/>
     <p:sldId id="261" r:id="rId7"/>
+    <p:sldId id="262" r:id="rId8"/>
+    <p:sldId id="263" r:id="rId9"/>
+    <p:sldId id="264" r:id="rId10"/>
+    <p:sldId id="265" r:id="rId11"/>
   </p:sldIdLst>
   <p:sldSz cx="12192000" cy="6858000"/>
   <p:notesSz cx="6858000" cy="9144000"/>
@@ -109,6 +113,33 @@
       </a:defRPr>
     </a:lvl9pPr>
   </p:defaultTextStyle>
+  <p:extLst>
+    <p:ext uri="{521415D9-36F7-43E2-AB2F-B90AF26B5E84}">
+      <p14:sectionLst xmlns:p14="http://schemas.microsoft.com/office/powerpoint/2010/main">
+        <p14:section name="Default Section" id="{B69091F2-28C8-4D41-B04E-873EB3C887B5}">
+          <p14:sldIdLst>
+            <p14:sldId id="256"/>
+            <p14:sldId id="257"/>
+            <p14:sldId id="258"/>
+            <p14:sldId id="259"/>
+            <p14:sldId id="260"/>
+            <p14:sldId id="261"/>
+          </p14:sldIdLst>
+        </p14:section>
+        <p14:section name="Random Forest" id="{FB098C8B-8C22-43BF-8413-7EC14FA4C8B4}">
+          <p14:sldIdLst>
+            <p14:sldId id="262"/>
+            <p14:sldId id="263"/>
+            <p14:sldId id="264"/>
+            <p14:sldId id="265"/>
+          </p14:sldIdLst>
+        </p14:section>
+      </p14:sectionLst>
+    </p:ext>
+    <p:ext uri="{EFAFB233-063F-42B5-8137-9DF3F51BA10A}">
+      <p15:sldGuideLst xmlns:p15="http://schemas.microsoft.com/office/powerpoint/2012/main"/>
+    </p:ext>
+  </p:extLst>
 </p:presentation>
 </file>
 
@@ -261,7 +292,7 @@
           <a:p>
             <a:fld id="{95A195F3-7F60-49EF-A166-79DEB6DB3044}" type="datetimeFigureOut">
               <a:rPr lang="zh-TW" altLang="en-US" smtClean="0"/>
-              <a:t>2026/3/13</a:t>
+              <a:t>2026/3/15</a:t>
             </a:fld>
             <a:endParaRPr lang="zh-TW" altLang="en-US"/>
           </a:p>
@@ -461,7 +492,7 @@
           <a:p>
             <a:fld id="{95A195F3-7F60-49EF-A166-79DEB6DB3044}" type="datetimeFigureOut">
               <a:rPr lang="zh-TW" altLang="en-US" smtClean="0"/>
-              <a:t>2026/3/13</a:t>
+              <a:t>2026/3/15</a:t>
             </a:fld>
             <a:endParaRPr lang="zh-TW" altLang="en-US"/>
           </a:p>
@@ -671,7 +702,7 @@
           <a:p>
             <a:fld id="{95A195F3-7F60-49EF-A166-79DEB6DB3044}" type="datetimeFigureOut">
               <a:rPr lang="zh-TW" altLang="en-US" smtClean="0"/>
-              <a:t>2026/3/13</a:t>
+              <a:t>2026/3/15</a:t>
             </a:fld>
             <a:endParaRPr lang="zh-TW" altLang="en-US"/>
           </a:p>
@@ -871,7 +902,7 @@
           <a:p>
             <a:fld id="{95A195F3-7F60-49EF-A166-79DEB6DB3044}" type="datetimeFigureOut">
               <a:rPr lang="zh-TW" altLang="en-US" smtClean="0"/>
-              <a:t>2026/3/13</a:t>
+              <a:t>2026/3/15</a:t>
             </a:fld>
             <a:endParaRPr lang="zh-TW" altLang="en-US"/>
           </a:p>
@@ -1147,7 +1178,7 @@
           <a:p>
             <a:fld id="{95A195F3-7F60-49EF-A166-79DEB6DB3044}" type="datetimeFigureOut">
               <a:rPr lang="zh-TW" altLang="en-US" smtClean="0"/>
-              <a:t>2026/3/13</a:t>
+              <a:t>2026/3/15</a:t>
             </a:fld>
             <a:endParaRPr lang="zh-TW" altLang="en-US"/>
           </a:p>
@@ -1415,7 +1446,7 @@
           <a:p>
             <a:fld id="{95A195F3-7F60-49EF-A166-79DEB6DB3044}" type="datetimeFigureOut">
               <a:rPr lang="zh-TW" altLang="en-US" smtClean="0"/>
-              <a:t>2026/3/13</a:t>
+              <a:t>2026/3/15</a:t>
             </a:fld>
             <a:endParaRPr lang="zh-TW" altLang="en-US"/>
           </a:p>
@@ -1830,7 +1861,7 @@
           <a:p>
             <a:fld id="{95A195F3-7F60-49EF-A166-79DEB6DB3044}" type="datetimeFigureOut">
               <a:rPr lang="zh-TW" altLang="en-US" smtClean="0"/>
-              <a:t>2026/3/13</a:t>
+              <a:t>2026/3/15</a:t>
             </a:fld>
             <a:endParaRPr lang="zh-TW" altLang="en-US"/>
           </a:p>
@@ -1972,7 +2003,7 @@
           <a:p>
             <a:fld id="{95A195F3-7F60-49EF-A166-79DEB6DB3044}" type="datetimeFigureOut">
               <a:rPr lang="zh-TW" altLang="en-US" smtClean="0"/>
-              <a:t>2026/3/13</a:t>
+              <a:t>2026/3/15</a:t>
             </a:fld>
             <a:endParaRPr lang="zh-TW" altLang="en-US"/>
           </a:p>
@@ -2085,7 +2116,7 @@
           <a:p>
             <a:fld id="{95A195F3-7F60-49EF-A166-79DEB6DB3044}" type="datetimeFigureOut">
               <a:rPr lang="zh-TW" altLang="en-US" smtClean="0"/>
-              <a:t>2026/3/13</a:t>
+              <a:t>2026/3/15</a:t>
             </a:fld>
             <a:endParaRPr lang="zh-TW" altLang="en-US"/>
           </a:p>
@@ -2398,7 +2429,7 @@
           <a:p>
             <a:fld id="{95A195F3-7F60-49EF-A166-79DEB6DB3044}" type="datetimeFigureOut">
               <a:rPr lang="zh-TW" altLang="en-US" smtClean="0"/>
-              <a:t>2026/3/13</a:t>
+              <a:t>2026/3/15</a:t>
             </a:fld>
             <a:endParaRPr lang="zh-TW" altLang="en-US"/>
           </a:p>
@@ -2687,7 +2718,7 @@
           <a:p>
             <a:fld id="{95A195F3-7F60-49EF-A166-79DEB6DB3044}" type="datetimeFigureOut">
               <a:rPr lang="zh-TW" altLang="en-US" smtClean="0"/>
-              <a:t>2026/3/13</a:t>
+              <a:t>2026/3/15</a:t>
             </a:fld>
             <a:endParaRPr lang="zh-TW" altLang="en-US"/>
           </a:p>
@@ -2930,7 +2961,7 @@
           <a:p>
             <a:fld id="{95A195F3-7F60-49EF-A166-79DEB6DB3044}" type="datetimeFigureOut">
               <a:rPr lang="zh-TW" altLang="en-US" smtClean="0"/>
-              <a:t>2026/3/13</a:t>
+              <a:t>2026/3/15</a:t>
             </a:fld>
             <a:endParaRPr lang="zh-TW" altLang="en-US"/>
           </a:p>
@@ -3410,6 +3441,318 @@
 </p:sld>
 </file>
 
+<file path=ppt/slides/slide10.xml><?xml version="1.0" encoding="utf-8"?>
+<p:sld xmlns:a="http://schemas.openxmlformats.org/drawingml/2006/main" xmlns:r="http://schemas.openxmlformats.org/officeDocument/2006/relationships" xmlns:p="http://schemas.openxmlformats.org/presentationml/2006/main">
+  <p:cSld>
+    <p:spTree>
+      <p:nvGrpSpPr>
+        <p:cNvPr id="1" name=""/>
+        <p:cNvGrpSpPr/>
+        <p:nvPr/>
+      </p:nvGrpSpPr>
+      <p:grpSpPr>
+        <a:xfrm>
+          <a:off x="0" y="0"/>
+          <a:ext cx="0" cy="0"/>
+          <a:chOff x="0" y="0"/>
+          <a:chExt cx="0" cy="0"/>
+        </a:xfrm>
+      </p:grpSpPr>
+      <p:pic>
+        <p:nvPicPr>
+          <p:cNvPr id="5" name="Picture 4">
+            <a:extLst>
+              <a:ext uri="{FF2B5EF4-FFF2-40B4-BE49-F238E27FC236}">
+                <a16:creationId xmlns:a16="http://schemas.microsoft.com/office/drawing/2014/main" id="{7C24FB19-3166-7064-7B07-09AFC48A69A7}"/>
+              </a:ext>
+            </a:extLst>
+          </p:cNvPr>
+          <p:cNvPicPr>
+            <a:picLocks noChangeAspect="1"/>
+          </p:cNvPicPr>
+          <p:nvPr/>
+        </p:nvPicPr>
+        <p:blipFill>
+          <a:blip r:embed="rId2"/>
+          <a:stretch>
+            <a:fillRect/>
+          </a:stretch>
+        </p:blipFill>
+        <p:spPr>
+          <a:xfrm>
+            <a:off x="0" y="480776"/>
+            <a:ext cx="12192000" cy="5896448"/>
+          </a:xfrm>
+          <a:prstGeom prst="rect">
+            <a:avLst/>
+          </a:prstGeom>
+        </p:spPr>
+      </p:pic>
+      <p:sp>
+        <p:nvSpPr>
+          <p:cNvPr id="6" name="Speech Bubble: Rectangle 5">
+            <a:extLst>
+              <a:ext uri="{FF2B5EF4-FFF2-40B4-BE49-F238E27FC236}">
+                <a16:creationId xmlns:a16="http://schemas.microsoft.com/office/drawing/2014/main" id="{D193E326-27BE-2EFF-8B39-511C5161B61F}"/>
+              </a:ext>
+            </a:extLst>
+          </p:cNvPr>
+          <p:cNvSpPr/>
+          <p:nvPr/>
+        </p:nvSpPr>
+        <p:spPr>
+          <a:xfrm>
+            <a:off x="6377725" y="2306027"/>
+            <a:ext cx="2994876" cy="726015"/>
+          </a:xfrm>
+          <a:prstGeom prst="wedgeRectCallout">
+            <a:avLst>
+              <a:gd name="adj1" fmla="val -71674"/>
+              <a:gd name="adj2" fmla="val 23671"/>
+            </a:avLst>
+          </a:prstGeom>
+          <a:solidFill>
+            <a:schemeClr val="accent2">
+              <a:lumMod val="20000"/>
+              <a:lumOff val="80000"/>
+            </a:schemeClr>
+          </a:solidFill>
+          <a:ln>
+            <a:solidFill>
+              <a:schemeClr val="accent2">
+                <a:lumMod val="40000"/>
+                <a:lumOff val="60000"/>
+              </a:schemeClr>
+            </a:solidFill>
+          </a:ln>
+        </p:spPr>
+        <p:style>
+          <a:lnRef idx="2">
+            <a:schemeClr val="accent1">
+              <a:shade val="15000"/>
+            </a:schemeClr>
+          </a:lnRef>
+          <a:fillRef idx="1">
+            <a:schemeClr val="accent1"/>
+          </a:fillRef>
+          <a:effectRef idx="0">
+            <a:schemeClr val="accent1"/>
+          </a:effectRef>
+          <a:fontRef idx="minor">
+            <a:schemeClr val="lt1"/>
+          </a:fontRef>
+        </p:style>
+        <p:txBody>
+          <a:bodyPr rtlCol="0" anchor="ctr"/>
+          <a:lstStyle/>
+          <a:p>
+            <a:r>
+              <a:rPr lang="en-US" altLang="zh-TW" sz="1100" b="1" dirty="0">
+                <a:solidFill>
+                  <a:schemeClr val="tx1"/>
+                </a:solidFill>
+              </a:rPr>
+              <a:t>Scenario Prediction</a:t>
+            </a:r>
+          </a:p>
+          <a:p>
+            <a:r>
+              <a:rPr lang="en-US" altLang="zh-TW" sz="1000" dirty="0">
+                <a:solidFill>
+                  <a:schemeClr val="tx1"/>
+                </a:solidFill>
+              </a:rPr>
+              <a:t>Allows users to input values for the selected variables, generate a predicted churn probability.</a:t>
+            </a:r>
+            <a:endParaRPr lang="zh-TW" altLang="en-US" sz="1000" dirty="0">
+              <a:solidFill>
+                <a:schemeClr val="tx1"/>
+              </a:solidFill>
+            </a:endParaRPr>
+          </a:p>
+        </p:txBody>
+      </p:sp>
+      <p:sp>
+        <p:nvSpPr>
+          <p:cNvPr id="7" name="Speech Bubble: Rectangle 6">
+            <a:extLst>
+              <a:ext uri="{FF2B5EF4-FFF2-40B4-BE49-F238E27FC236}">
+                <a16:creationId xmlns:a16="http://schemas.microsoft.com/office/drawing/2014/main" id="{9CB374DC-37D6-2084-3BAD-D6B21C6924AC}"/>
+              </a:ext>
+            </a:extLst>
+          </p:cNvPr>
+          <p:cNvSpPr/>
+          <p:nvPr/>
+        </p:nvSpPr>
+        <p:spPr>
+          <a:xfrm>
+            <a:off x="4625124" y="5130799"/>
+            <a:ext cx="1862666" cy="663004"/>
+          </a:xfrm>
+          <a:prstGeom prst="wedgeRectCallout">
+            <a:avLst>
+              <a:gd name="adj1" fmla="val -48265"/>
+              <a:gd name="adj2" fmla="val -108877"/>
+            </a:avLst>
+          </a:prstGeom>
+          <a:solidFill>
+            <a:schemeClr val="accent6">
+              <a:lumMod val="20000"/>
+              <a:lumOff val="80000"/>
+            </a:schemeClr>
+          </a:solidFill>
+          <a:ln>
+            <a:solidFill>
+              <a:schemeClr val="accent2">
+                <a:lumMod val="40000"/>
+                <a:lumOff val="60000"/>
+              </a:schemeClr>
+            </a:solidFill>
+          </a:ln>
+        </p:spPr>
+        <p:style>
+          <a:lnRef idx="2">
+            <a:schemeClr val="accent1">
+              <a:shade val="15000"/>
+            </a:schemeClr>
+          </a:lnRef>
+          <a:fillRef idx="1">
+            <a:schemeClr val="accent1"/>
+          </a:fillRef>
+          <a:effectRef idx="0">
+            <a:schemeClr val="accent1"/>
+          </a:effectRef>
+          <a:fontRef idx="minor">
+            <a:schemeClr val="lt1"/>
+          </a:fontRef>
+        </p:style>
+        <p:txBody>
+          <a:bodyPr rtlCol="0" anchor="ctr"/>
+          <a:lstStyle/>
+          <a:p>
+            <a:r>
+              <a:rPr lang="en-US" altLang="zh-TW" sz="1100" b="1" dirty="0">
+                <a:solidFill>
+                  <a:schemeClr val="tx1"/>
+                </a:solidFill>
+              </a:rPr>
+              <a:t>Input Scenario</a:t>
+            </a:r>
+          </a:p>
+          <a:p>
+            <a:r>
+              <a:rPr lang="en-US" altLang="zh-TW" sz="1000" dirty="0">
+                <a:solidFill>
+                  <a:schemeClr val="tx1"/>
+                </a:solidFill>
+              </a:rPr>
+              <a:t>Enter values for the variables used in the current model.</a:t>
+            </a:r>
+            <a:endParaRPr lang="zh-TW" altLang="en-US" sz="800" dirty="0">
+              <a:solidFill>
+                <a:schemeClr val="tx1"/>
+              </a:solidFill>
+            </a:endParaRPr>
+          </a:p>
+        </p:txBody>
+      </p:sp>
+      <p:sp>
+        <p:nvSpPr>
+          <p:cNvPr id="8" name="Speech Bubble: Rectangle 7">
+            <a:extLst>
+              <a:ext uri="{FF2B5EF4-FFF2-40B4-BE49-F238E27FC236}">
+                <a16:creationId xmlns:a16="http://schemas.microsoft.com/office/drawing/2014/main" id="{D5113FAC-A548-0F4E-AC52-2A078AE8A33F}"/>
+              </a:ext>
+            </a:extLst>
+          </p:cNvPr>
+          <p:cNvSpPr/>
+          <p:nvPr/>
+        </p:nvSpPr>
+        <p:spPr>
+          <a:xfrm>
+            <a:off x="8784582" y="3418416"/>
+            <a:ext cx="1862666" cy="663004"/>
+          </a:xfrm>
+          <a:prstGeom prst="wedgeRectCallout">
+            <a:avLst>
+              <a:gd name="adj1" fmla="val -79174"/>
+              <a:gd name="adj2" fmla="val 27764"/>
+            </a:avLst>
+          </a:prstGeom>
+          <a:solidFill>
+            <a:schemeClr val="accent6">
+              <a:lumMod val="20000"/>
+              <a:lumOff val="80000"/>
+            </a:schemeClr>
+          </a:solidFill>
+          <a:ln>
+            <a:solidFill>
+              <a:schemeClr val="accent2">
+                <a:lumMod val="40000"/>
+                <a:lumOff val="60000"/>
+              </a:schemeClr>
+            </a:solidFill>
+          </a:ln>
+        </p:spPr>
+        <p:style>
+          <a:lnRef idx="2">
+            <a:schemeClr val="accent1">
+              <a:shade val="15000"/>
+            </a:schemeClr>
+          </a:lnRef>
+          <a:fillRef idx="1">
+            <a:schemeClr val="accent1"/>
+          </a:fillRef>
+          <a:effectRef idx="0">
+            <a:schemeClr val="accent1"/>
+          </a:effectRef>
+          <a:fontRef idx="minor">
+            <a:schemeClr val="lt1"/>
+          </a:fontRef>
+        </p:style>
+        <p:txBody>
+          <a:bodyPr rtlCol="0" anchor="ctr"/>
+          <a:lstStyle/>
+          <a:p>
+            <a:r>
+              <a:rPr lang="en-US" altLang="zh-TW" sz="1100" b="1" dirty="0">
+                <a:solidFill>
+                  <a:schemeClr val="tx1"/>
+                </a:solidFill>
+              </a:rPr>
+              <a:t>Prediction Result</a:t>
+            </a:r>
+          </a:p>
+          <a:p>
+            <a:r>
+              <a:rPr lang="en-US" altLang="zh-TW" sz="1000" dirty="0">
+                <a:solidFill>
+                  <a:schemeClr val="tx1"/>
+                </a:solidFill>
+              </a:rPr>
+              <a:t>Displays the predicted churn probability for the selected input scenario.</a:t>
+            </a:r>
+            <a:endParaRPr lang="zh-TW" altLang="en-US" sz="800" dirty="0">
+              <a:solidFill>
+                <a:schemeClr val="tx1"/>
+              </a:solidFill>
+            </a:endParaRPr>
+          </a:p>
+        </p:txBody>
+      </p:sp>
+    </p:spTree>
+    <p:extLst>
+      <p:ext uri="{BB962C8B-B14F-4D97-AF65-F5344CB8AC3E}">
+        <p14:creationId xmlns:p14="http://schemas.microsoft.com/office/powerpoint/2010/main" val="1311413873"/>
+      </p:ext>
+    </p:extLst>
+  </p:cSld>
+  <p:clrMapOvr>
+    <a:masterClrMapping/>
+  </p:clrMapOvr>
+</p:sld>
+</file>
+
 <file path=ppt/slides/slide2.xml><?xml version="1.0" encoding="utf-8"?>
 <p:sld xmlns:a="http://schemas.openxmlformats.org/drawingml/2006/main" xmlns:r="http://schemas.openxmlformats.org/officeDocument/2006/relationships" xmlns:p="http://schemas.openxmlformats.org/presentationml/2006/main">
   <p:cSld>
@@ -3429,10 +3772,10 @@
       </p:grpSpPr>
       <p:pic>
         <p:nvPicPr>
-          <p:cNvPr id="5" name="Picture 4">
-            <a:extLst>
-              <a:ext uri="{FF2B5EF4-FFF2-40B4-BE49-F238E27FC236}">
-                <a16:creationId xmlns:a16="http://schemas.microsoft.com/office/drawing/2014/main" id="{557EE360-EF95-56BD-186C-60FA6F2BDBF9}"/>
+          <p:cNvPr id="3" name="Picture 2">
+            <a:extLst>
+              <a:ext uri="{FF2B5EF4-FFF2-40B4-BE49-F238E27FC236}">
+                <a16:creationId xmlns:a16="http://schemas.microsoft.com/office/drawing/2014/main" id="{52FBB84D-280F-08C7-2318-053A1901C6AF}"/>
               </a:ext>
             </a:extLst>
           </p:cNvPr>
@@ -3449,8 +3792,8 @@
         </p:blipFill>
         <p:spPr>
           <a:xfrm>
-            <a:off x="66461" y="0"/>
-            <a:ext cx="12059077" cy="6858000"/>
+            <a:off x="102400" y="0"/>
+            <a:ext cx="11987200" cy="6858000"/>
           </a:xfrm>
           <a:prstGeom prst="rect">
             <a:avLst/>
@@ -3495,10 +3838,10 @@
       </p:grpSpPr>
       <p:pic>
         <p:nvPicPr>
-          <p:cNvPr id="5" name="Picture 4">
-            <a:extLst>
-              <a:ext uri="{FF2B5EF4-FFF2-40B4-BE49-F238E27FC236}">
-                <a16:creationId xmlns:a16="http://schemas.microsoft.com/office/drawing/2014/main" id="{A636955B-7563-7F46-0E44-C3B90D560515}"/>
+          <p:cNvPr id="3" name="Picture 2">
+            <a:extLst>
+              <a:ext uri="{FF2B5EF4-FFF2-40B4-BE49-F238E27FC236}">
+                <a16:creationId xmlns:a16="http://schemas.microsoft.com/office/drawing/2014/main" id="{65D24DF2-D671-25B5-A05A-8968969735C4}"/>
               </a:ext>
             </a:extLst>
           </p:cNvPr>
@@ -3515,8 +3858,8 @@
         </p:blipFill>
         <p:spPr>
           <a:xfrm>
-            <a:off x="66461" y="0"/>
-            <a:ext cx="12059077" cy="6858000"/>
+            <a:off x="102400" y="0"/>
+            <a:ext cx="11987200" cy="6858000"/>
           </a:xfrm>
           <a:prstGeom prst="rect">
             <a:avLst/>
@@ -3537,7 +3880,7 @@
         </p:nvSpPr>
         <p:spPr>
           <a:xfrm>
-            <a:off x="1491825" y="270931"/>
+            <a:off x="1568025" y="628644"/>
             <a:ext cx="2216576" cy="829735"/>
           </a:xfrm>
           <a:prstGeom prst="wedgeRectCallout">
@@ -3622,13 +3965,13 @@
         </p:nvSpPr>
         <p:spPr>
           <a:xfrm>
-            <a:off x="2600113" y="1583260"/>
-            <a:ext cx="2733886" cy="499541"/>
+            <a:off x="3066625" y="2025639"/>
+            <a:ext cx="3156372" cy="499541"/>
           </a:xfrm>
           <a:prstGeom prst="wedgeRectCallout">
             <a:avLst>
-              <a:gd name="adj1" fmla="val -63811"/>
-              <a:gd name="adj2" fmla="val 2744"/>
+              <a:gd name="adj1" fmla="val -65669"/>
+              <a:gd name="adj2" fmla="val 21388"/>
             </a:avLst>
           </a:prstGeom>
           <a:solidFill>
@@ -3707,13 +4050,13 @@
         </p:nvSpPr>
         <p:spPr>
           <a:xfrm>
-            <a:off x="2600113" y="2294464"/>
-            <a:ext cx="2733886" cy="685803"/>
+            <a:off x="3066625" y="2626779"/>
+            <a:ext cx="3156373" cy="685803"/>
           </a:xfrm>
           <a:prstGeom prst="wedgeRectCallout">
             <a:avLst>
-              <a:gd name="adj1" fmla="val -61891"/>
-              <a:gd name="adj2" fmla="val 2201"/>
+              <a:gd name="adj1" fmla="val -62696"/>
+              <a:gd name="adj2" fmla="val 33065"/>
             </a:avLst>
           </a:prstGeom>
           <a:solidFill>
@@ -3791,13 +4134,13 @@
         </p:nvSpPr>
         <p:spPr>
           <a:xfrm>
-            <a:off x="2600113" y="3090329"/>
-            <a:ext cx="2733887" cy="787405"/>
+            <a:off x="3066627" y="3370784"/>
+            <a:ext cx="3156374" cy="787405"/>
           </a:xfrm>
           <a:prstGeom prst="wedgeRectCallout">
             <a:avLst>
-              <a:gd name="adj1" fmla="val -60391"/>
-              <a:gd name="adj2" fmla="val -1770"/>
+              <a:gd name="adj1" fmla="val -62269"/>
+              <a:gd name="adj2" fmla="val 20810"/>
             </a:avLst>
           </a:prstGeom>
           <a:solidFill>
@@ -3875,13 +4218,13 @@
         </p:nvSpPr>
         <p:spPr>
           <a:xfrm>
-            <a:off x="2600113" y="4089395"/>
-            <a:ext cx="2733885" cy="795868"/>
+            <a:off x="3066627" y="4231221"/>
+            <a:ext cx="3156374" cy="795868"/>
           </a:xfrm>
           <a:prstGeom prst="wedgeRectCallout">
             <a:avLst>
-              <a:gd name="adj1" fmla="val -65655"/>
-              <a:gd name="adj2" fmla="val -35011"/>
+              <a:gd name="adj1" fmla="val -61095"/>
+              <a:gd name="adj2" fmla="val 17117"/>
             </a:avLst>
           </a:prstGeom>
           <a:solidFill>
@@ -3959,13 +4302,13 @@
         </p:nvSpPr>
         <p:spPr>
           <a:xfrm>
-            <a:off x="2380826" y="4957231"/>
-            <a:ext cx="2436708" cy="914400"/>
+            <a:off x="2380826" y="5128688"/>
+            <a:ext cx="3842174" cy="685803"/>
           </a:xfrm>
           <a:prstGeom prst="wedgeRectCallout">
             <a:avLst>
-              <a:gd name="adj1" fmla="val -98656"/>
-              <a:gd name="adj2" fmla="val -71496"/>
+              <a:gd name="adj1" fmla="val -80146"/>
+              <a:gd name="adj2" fmla="val -27052"/>
             </a:avLst>
           </a:prstGeom>
           <a:solidFill>
@@ -4044,8 +4387,8 @@
         </p:nvSpPr>
         <p:spPr>
           <a:xfrm>
-            <a:off x="2380826" y="5907615"/>
-            <a:ext cx="2436708" cy="914400"/>
+            <a:off x="3066626" y="6136217"/>
+            <a:ext cx="3156374" cy="685804"/>
           </a:xfrm>
           <a:prstGeom prst="wedgeRectCallout">
             <a:avLst>
@@ -4153,10 +4496,10 @@
       </p:grpSpPr>
       <p:pic>
         <p:nvPicPr>
-          <p:cNvPr id="5" name="Picture 4">
-            <a:extLst>
-              <a:ext uri="{FF2B5EF4-FFF2-40B4-BE49-F238E27FC236}">
-                <a16:creationId xmlns:a16="http://schemas.microsoft.com/office/drawing/2014/main" id="{0AECCC94-3696-C5B1-A34E-44FCD49E65D5}"/>
+          <p:cNvPr id="4" name="Picture 3">
+            <a:extLst>
+              <a:ext uri="{FF2B5EF4-FFF2-40B4-BE49-F238E27FC236}">
+                <a16:creationId xmlns:a16="http://schemas.microsoft.com/office/drawing/2014/main" id="{346428F8-3794-EB85-6255-BE74570B628E}"/>
               </a:ext>
             </a:extLst>
           </p:cNvPr>
@@ -4173,8 +4516,8 @@
         </p:blipFill>
         <p:spPr>
           <a:xfrm>
-            <a:off x="66461" y="0"/>
-            <a:ext cx="12059077" cy="6858000"/>
+            <a:off x="102400" y="0"/>
+            <a:ext cx="11987200" cy="6858000"/>
           </a:xfrm>
           <a:prstGeom prst="rect">
             <a:avLst/>
@@ -4195,7 +4538,7 @@
         </p:nvSpPr>
         <p:spPr>
           <a:xfrm>
-            <a:off x="5505658" y="114294"/>
+            <a:off x="5581858" y="639228"/>
             <a:ext cx="2994876" cy="503773"/>
           </a:xfrm>
           <a:prstGeom prst="wedgeRectCallout">
@@ -4280,7 +4623,7 @@
         </p:nvSpPr>
         <p:spPr>
           <a:xfrm>
-            <a:off x="3007992" y="1663694"/>
+            <a:off x="2959157" y="2063746"/>
             <a:ext cx="1775675" cy="1189573"/>
           </a:xfrm>
           <a:prstGeom prst="wedgeRectCallout">
@@ -4364,7 +4707,7 @@
         </p:nvSpPr>
         <p:spPr>
           <a:xfrm>
-            <a:off x="5106561" y="1663694"/>
+            <a:off x="5111541" y="2063745"/>
             <a:ext cx="1775675" cy="1189573"/>
           </a:xfrm>
           <a:prstGeom prst="wedgeRectCallout">
@@ -4448,7 +4791,7 @@
         </p:nvSpPr>
         <p:spPr>
           <a:xfrm>
-            <a:off x="7080460" y="1663694"/>
+            <a:off x="7003096" y="2063745"/>
             <a:ext cx="1775675" cy="994839"/>
           </a:xfrm>
           <a:prstGeom prst="wedgeRectCallout">
@@ -4556,10 +4899,10 @@
       </p:grpSpPr>
       <p:pic>
         <p:nvPicPr>
-          <p:cNvPr id="5" name="Picture 4">
-            <a:extLst>
-              <a:ext uri="{FF2B5EF4-FFF2-40B4-BE49-F238E27FC236}">
-                <a16:creationId xmlns:a16="http://schemas.microsoft.com/office/drawing/2014/main" id="{76BFC8D7-BAA5-A71E-BA63-41BD17B58B54}"/>
+          <p:cNvPr id="2" name="Picture 1">
+            <a:extLst>
+              <a:ext uri="{FF2B5EF4-FFF2-40B4-BE49-F238E27FC236}">
+                <a16:creationId xmlns:a16="http://schemas.microsoft.com/office/drawing/2014/main" id="{09871B05-2011-2B11-187F-947CB7A58ACC}"/>
               </a:ext>
             </a:extLst>
           </p:cNvPr>
@@ -4576,8 +4919,8 @@
         </p:blipFill>
         <p:spPr>
           <a:xfrm>
-            <a:off x="66461" y="0"/>
-            <a:ext cx="12059077" cy="6858000"/>
+            <a:off x="102400" y="0"/>
+            <a:ext cx="11987200" cy="6858000"/>
           </a:xfrm>
           <a:prstGeom prst="rect">
             <a:avLst/>
@@ -4598,7 +4941,7 @@
         </p:nvSpPr>
         <p:spPr>
           <a:xfrm>
-            <a:off x="4658991" y="2163228"/>
+            <a:off x="4769058" y="2736852"/>
             <a:ext cx="2994876" cy="1037172"/>
           </a:xfrm>
           <a:prstGeom prst="wedgeRectCallout">
@@ -4682,7 +5025,7 @@
         </p:nvSpPr>
         <p:spPr>
           <a:xfrm>
-            <a:off x="8926191" y="1109133"/>
+            <a:off x="8739924" y="1710266"/>
             <a:ext cx="2994876" cy="812800"/>
           </a:xfrm>
           <a:prstGeom prst="wedgeRectCallout">
@@ -4766,7 +5109,7 @@
         </p:nvSpPr>
         <p:spPr>
           <a:xfrm>
-            <a:off x="4658991" y="5647266"/>
+            <a:off x="4769058" y="5990167"/>
             <a:ext cx="2994876" cy="812800"/>
           </a:xfrm>
           <a:prstGeom prst="wedgeRectCallout">
@@ -4850,13 +5193,13 @@
         </p:nvSpPr>
         <p:spPr>
           <a:xfrm>
-            <a:off x="5039991" y="1221319"/>
+            <a:off x="5234724" y="1805519"/>
             <a:ext cx="2994876" cy="812800"/>
           </a:xfrm>
           <a:prstGeom prst="wedgeRectCallout">
             <a:avLst>
-              <a:gd name="adj1" fmla="val -73088"/>
-              <a:gd name="adj2" fmla="val 33000"/>
+              <a:gd name="adj1" fmla="val -73371"/>
+              <a:gd name="adj2" fmla="val 20500"/>
             </a:avLst>
           </a:prstGeom>
           <a:solidFill>
@@ -4952,10 +5295,10 @@
       </p:grpSpPr>
       <p:pic>
         <p:nvPicPr>
-          <p:cNvPr id="5" name="Picture 4">
-            <a:extLst>
-              <a:ext uri="{FF2B5EF4-FFF2-40B4-BE49-F238E27FC236}">
-                <a16:creationId xmlns:a16="http://schemas.microsoft.com/office/drawing/2014/main" id="{2A4D25F8-CD3F-76AC-3862-3042382DD45F}"/>
+          <p:cNvPr id="4" name="Picture 3">
+            <a:extLst>
+              <a:ext uri="{FF2B5EF4-FFF2-40B4-BE49-F238E27FC236}">
+                <a16:creationId xmlns:a16="http://schemas.microsoft.com/office/drawing/2014/main" id="{58C213E4-9B64-EE66-2E02-1C280C9022EF}"/>
               </a:ext>
             </a:extLst>
           </p:cNvPr>
@@ -4972,8 +5315,8 @@
         </p:blipFill>
         <p:spPr>
           <a:xfrm>
-            <a:off x="0" y="28005"/>
-            <a:ext cx="12192000" cy="6801989"/>
+            <a:off x="0" y="20242"/>
+            <a:ext cx="12192000" cy="6817515"/>
           </a:xfrm>
           <a:prstGeom prst="rect">
             <a:avLst/>
@@ -4994,7 +5337,7 @@
         </p:nvSpPr>
         <p:spPr>
           <a:xfrm>
-            <a:off x="6250724" y="1407586"/>
+            <a:off x="6352325" y="1908094"/>
             <a:ext cx="2994876" cy="726015"/>
           </a:xfrm>
           <a:prstGeom prst="wedgeRectCallout">
@@ -5078,7 +5421,7 @@
         </p:nvSpPr>
         <p:spPr>
           <a:xfrm>
-            <a:off x="4294924" y="3028463"/>
+            <a:off x="4345724" y="3428999"/>
             <a:ext cx="1862666" cy="663004"/>
           </a:xfrm>
           <a:prstGeom prst="wedgeRectCallout">
@@ -5167,8 +5510,8 @@
           </a:xfrm>
           <a:prstGeom prst="wedgeRectCallout">
             <a:avLst>
-              <a:gd name="adj1" fmla="val -70083"/>
-              <a:gd name="adj2" fmla="val -43749"/>
+              <a:gd name="adj1" fmla="val -79174"/>
+              <a:gd name="adj2" fmla="val 27764"/>
             </a:avLst>
           </a:prstGeom>
           <a:solidFill>
@@ -5246,13 +5589,13 @@
         </p:nvSpPr>
         <p:spPr>
           <a:xfrm>
-            <a:off x="8589848" y="4223891"/>
+            <a:off x="8589848" y="4521961"/>
             <a:ext cx="1862666" cy="949242"/>
           </a:xfrm>
           <a:prstGeom prst="wedgeRectCallout">
             <a:avLst>
-              <a:gd name="adj1" fmla="val -70083"/>
-              <a:gd name="adj2" fmla="val -43749"/>
+              <a:gd name="adj1" fmla="val -68265"/>
+              <a:gd name="adj2" fmla="val -9855"/>
             </a:avLst>
           </a:prstGeom>
           <a:solidFill>
@@ -5330,13 +5673,13 @@
         </p:nvSpPr>
         <p:spPr>
           <a:xfrm>
-            <a:off x="4506589" y="5907130"/>
+            <a:off x="4863351" y="5998095"/>
             <a:ext cx="2690077" cy="663004"/>
           </a:xfrm>
           <a:prstGeom prst="wedgeRectCallout">
             <a:avLst>
-              <a:gd name="adj1" fmla="val -50538"/>
-              <a:gd name="adj2" fmla="val -70567"/>
+              <a:gd name="adj1" fmla="val -68163"/>
+              <a:gd name="adj2" fmla="val 8608"/>
             </a:avLst>
           </a:prstGeom>
           <a:solidFill>
@@ -5404,6 +5747,1206 @@
     <p:extLst>
       <p:ext uri="{BB962C8B-B14F-4D97-AF65-F5344CB8AC3E}">
         <p14:creationId xmlns:p14="http://schemas.microsoft.com/office/powerpoint/2010/main" val="2080803109"/>
+      </p:ext>
+    </p:extLst>
+  </p:cSld>
+  <p:clrMapOvr>
+    <a:masterClrMapping/>
+  </p:clrMapOvr>
+</p:sld>
+</file>
+
+<file path=ppt/slides/slide7.xml><?xml version="1.0" encoding="utf-8"?>
+<p:sld xmlns:a="http://schemas.openxmlformats.org/drawingml/2006/main" xmlns:r="http://schemas.openxmlformats.org/officeDocument/2006/relationships" xmlns:p="http://schemas.openxmlformats.org/presentationml/2006/main">
+  <p:cSld>
+    <p:spTree>
+      <p:nvGrpSpPr>
+        <p:cNvPr id="1" name=""/>
+        <p:cNvGrpSpPr/>
+        <p:nvPr/>
+      </p:nvGrpSpPr>
+      <p:grpSpPr>
+        <a:xfrm>
+          <a:off x="0" y="0"/>
+          <a:ext cx="0" cy="0"/>
+          <a:chOff x="0" y="0"/>
+          <a:chExt cx="0" cy="0"/>
+        </a:xfrm>
+      </p:grpSpPr>
+      <p:pic>
+        <p:nvPicPr>
+          <p:cNvPr id="7" name="Picture 6">
+            <a:extLst>
+              <a:ext uri="{FF2B5EF4-FFF2-40B4-BE49-F238E27FC236}">
+                <a16:creationId xmlns:a16="http://schemas.microsoft.com/office/drawing/2014/main" id="{1098A81A-EE71-7AF2-0453-9C37173EDA09}"/>
+              </a:ext>
+            </a:extLst>
+          </p:cNvPr>
+          <p:cNvPicPr>
+            <a:picLocks noChangeAspect="1"/>
+          </p:cNvPicPr>
+          <p:nvPr/>
+        </p:nvPicPr>
+        <p:blipFill>
+          <a:blip r:embed="rId2"/>
+          <a:stretch>
+            <a:fillRect/>
+          </a:stretch>
+        </p:blipFill>
+        <p:spPr>
+          <a:xfrm>
+            <a:off x="0" y="528587"/>
+            <a:ext cx="12192000" cy="5800825"/>
+          </a:xfrm>
+          <a:prstGeom prst="rect">
+            <a:avLst/>
+          </a:prstGeom>
+        </p:spPr>
+      </p:pic>
+      <p:sp>
+        <p:nvSpPr>
+          <p:cNvPr id="8" name="Speech Bubble: Rectangle 7">
+            <a:extLst>
+              <a:ext uri="{FF2B5EF4-FFF2-40B4-BE49-F238E27FC236}">
+                <a16:creationId xmlns:a16="http://schemas.microsoft.com/office/drawing/2014/main" id="{65A39ED5-200A-D8C6-8AD7-CDF69197488F}"/>
+              </a:ext>
+            </a:extLst>
+          </p:cNvPr>
+          <p:cNvSpPr/>
+          <p:nvPr/>
+        </p:nvSpPr>
+        <p:spPr>
+          <a:xfrm>
+            <a:off x="1893145" y="1258564"/>
+            <a:ext cx="2216576" cy="829735"/>
+          </a:xfrm>
+          <a:prstGeom prst="wedgeRectCallout">
+            <a:avLst>
+              <a:gd name="adj1" fmla="val -38601"/>
+              <a:gd name="adj2" fmla="val 64989"/>
+            </a:avLst>
+          </a:prstGeom>
+          <a:solidFill>
+            <a:schemeClr val="accent6">
+              <a:lumMod val="20000"/>
+              <a:lumOff val="80000"/>
+            </a:schemeClr>
+          </a:solidFill>
+          <a:ln>
+            <a:solidFill>
+              <a:schemeClr val="accent2">
+                <a:lumMod val="40000"/>
+                <a:lumOff val="60000"/>
+              </a:schemeClr>
+            </a:solidFill>
+          </a:ln>
+        </p:spPr>
+        <p:style>
+          <a:lnRef idx="2">
+            <a:schemeClr val="accent1">
+              <a:shade val="15000"/>
+            </a:schemeClr>
+          </a:lnRef>
+          <a:fillRef idx="1">
+            <a:schemeClr val="accent1"/>
+          </a:fillRef>
+          <a:effectRef idx="0">
+            <a:schemeClr val="accent1"/>
+          </a:effectRef>
+          <a:fontRef idx="minor">
+            <a:schemeClr val="lt1"/>
+          </a:fontRef>
+        </p:style>
+        <p:txBody>
+          <a:bodyPr rtlCol="0" anchor="ctr"/>
+          <a:lstStyle/>
+          <a:p>
+            <a:r>
+              <a:rPr lang="en-US" altLang="zh-TW" sz="1100" b="1" dirty="0">
+                <a:solidFill>
+                  <a:schemeClr val="tx1"/>
+                </a:solidFill>
+              </a:rPr>
+              <a:t>Variable Selection</a:t>
+            </a:r>
+          </a:p>
+          <a:p>
+            <a:pPr algn="just"/>
+            <a:r>
+              <a:rPr lang="en-US" altLang="zh-TW" sz="1000" dirty="0">
+                <a:solidFill>
+                  <a:schemeClr val="tx1"/>
+                </a:solidFill>
+              </a:rPr>
+              <a:t>Multiple variables allowed. Displays names if &lt;10 selected; otherwise, shows count only. Includes "Select All" and "Deselect All”.</a:t>
+            </a:r>
+            <a:endParaRPr lang="zh-TW" altLang="en-US" sz="1000" dirty="0">
+              <a:solidFill>
+                <a:schemeClr val="tx1"/>
+              </a:solidFill>
+            </a:endParaRPr>
+          </a:p>
+        </p:txBody>
+      </p:sp>
+      <p:sp>
+        <p:nvSpPr>
+          <p:cNvPr id="9" name="Speech Bubble: Rectangle 8">
+            <a:extLst>
+              <a:ext uri="{FF2B5EF4-FFF2-40B4-BE49-F238E27FC236}">
+                <a16:creationId xmlns:a16="http://schemas.microsoft.com/office/drawing/2014/main" id="{AB3EB0B2-45E3-8759-6D58-FD9F7E4CF900}"/>
+              </a:ext>
+            </a:extLst>
+          </p:cNvPr>
+          <p:cNvSpPr/>
+          <p:nvPr/>
+        </p:nvSpPr>
+        <p:spPr>
+          <a:xfrm>
+            <a:off x="2802465" y="2517705"/>
+            <a:ext cx="3156372" cy="499541"/>
+          </a:xfrm>
+          <a:prstGeom prst="wedgeRectCallout">
+            <a:avLst>
+              <a:gd name="adj1" fmla="val -65669"/>
+              <a:gd name="adj2" fmla="val 21388"/>
+            </a:avLst>
+          </a:prstGeom>
+          <a:solidFill>
+            <a:schemeClr val="accent6">
+              <a:lumMod val="20000"/>
+              <a:lumOff val="80000"/>
+            </a:schemeClr>
+          </a:solidFill>
+          <a:ln>
+            <a:solidFill>
+              <a:schemeClr val="accent2">
+                <a:lumMod val="40000"/>
+                <a:lumOff val="60000"/>
+              </a:schemeClr>
+            </a:solidFill>
+          </a:ln>
+        </p:spPr>
+        <p:style>
+          <a:lnRef idx="2">
+            <a:schemeClr val="accent1">
+              <a:shade val="15000"/>
+            </a:schemeClr>
+          </a:lnRef>
+          <a:fillRef idx="1">
+            <a:schemeClr val="accent1"/>
+          </a:fillRef>
+          <a:effectRef idx="0">
+            <a:schemeClr val="accent1"/>
+          </a:effectRef>
+          <a:fontRef idx="minor">
+            <a:schemeClr val="lt1"/>
+          </a:fontRef>
+        </p:style>
+        <p:txBody>
+          <a:bodyPr rtlCol="0" anchor="ctr"/>
+          <a:lstStyle/>
+          <a:p>
+            <a:r>
+              <a:rPr lang="en-US" altLang="zh-TW" sz="1100" b="1" dirty="0">
+                <a:solidFill>
+                  <a:schemeClr val="tx1"/>
+                </a:solidFill>
+              </a:rPr>
+              <a:t>Train/ Test Split Ratio</a:t>
+            </a:r>
+          </a:p>
+          <a:p>
+            <a:pPr algn="just"/>
+            <a:r>
+              <a:rPr lang="en-US" altLang="zh-TW" sz="1000" dirty="0">
+                <a:solidFill>
+                  <a:schemeClr val="tx1"/>
+                </a:solidFill>
+              </a:rPr>
+              <a:t>Set train/test split ratio. (Default: 80% training, 20% testing.)</a:t>
+            </a:r>
+            <a:endParaRPr lang="zh-TW" altLang="en-US" sz="1000" dirty="0">
+              <a:solidFill>
+                <a:schemeClr val="tx1"/>
+              </a:solidFill>
+            </a:endParaRPr>
+          </a:p>
+        </p:txBody>
+      </p:sp>
+      <p:sp>
+        <p:nvSpPr>
+          <p:cNvPr id="10" name="Speech Bubble: Rectangle 9">
+            <a:extLst>
+              <a:ext uri="{FF2B5EF4-FFF2-40B4-BE49-F238E27FC236}">
+                <a16:creationId xmlns:a16="http://schemas.microsoft.com/office/drawing/2014/main" id="{A086DA89-88EE-8320-26A6-1179074828FB}"/>
+              </a:ext>
+            </a:extLst>
+          </p:cNvPr>
+          <p:cNvSpPr/>
+          <p:nvPr/>
+        </p:nvSpPr>
+        <p:spPr>
+          <a:xfrm>
+            <a:off x="2802465" y="3087803"/>
+            <a:ext cx="3156372" cy="809921"/>
+          </a:xfrm>
+          <a:prstGeom prst="wedgeRectCallout">
+            <a:avLst>
+              <a:gd name="adj1" fmla="val -65669"/>
+              <a:gd name="adj2" fmla="val 21388"/>
+            </a:avLst>
+          </a:prstGeom>
+          <a:solidFill>
+            <a:schemeClr val="accent6">
+              <a:lumMod val="20000"/>
+              <a:lumOff val="80000"/>
+            </a:schemeClr>
+          </a:solidFill>
+          <a:ln>
+            <a:solidFill>
+              <a:schemeClr val="accent2">
+                <a:lumMod val="40000"/>
+                <a:lumOff val="60000"/>
+              </a:schemeClr>
+            </a:solidFill>
+          </a:ln>
+        </p:spPr>
+        <p:style>
+          <a:lnRef idx="2">
+            <a:schemeClr val="accent1">
+              <a:shade val="15000"/>
+            </a:schemeClr>
+          </a:lnRef>
+          <a:fillRef idx="1">
+            <a:schemeClr val="accent1"/>
+          </a:fillRef>
+          <a:effectRef idx="0">
+            <a:schemeClr val="accent1"/>
+          </a:effectRef>
+          <a:fontRef idx="minor">
+            <a:schemeClr val="lt1"/>
+          </a:fontRef>
+        </p:style>
+        <p:txBody>
+          <a:bodyPr rtlCol="0" anchor="ctr"/>
+          <a:lstStyle/>
+          <a:p>
+            <a:r>
+              <a:rPr lang="en-US" altLang="zh-TW" sz="1100" b="1" dirty="0">
+                <a:solidFill>
+                  <a:schemeClr val="tx1"/>
+                </a:solidFill>
+              </a:rPr>
+              <a:t>Number of Trees</a:t>
+            </a:r>
+          </a:p>
+          <a:p>
+            <a:pPr algn="just"/>
+            <a:r>
+              <a:rPr lang="en-US" altLang="zh-TW" sz="1000" dirty="0">
+                <a:solidFill>
+                  <a:schemeClr val="tx1"/>
+                </a:solidFill>
+              </a:rPr>
+              <a:t>Specifies the total number of decision trees to be built in the forest. A higher number typically increases model stability and accuracy but requires more computational time. (Default: 100)</a:t>
+            </a:r>
+            <a:endParaRPr lang="zh-TW" altLang="en-US" sz="1000" dirty="0">
+              <a:solidFill>
+                <a:schemeClr val="tx1"/>
+              </a:solidFill>
+            </a:endParaRPr>
+          </a:p>
+        </p:txBody>
+      </p:sp>
+      <p:sp>
+        <p:nvSpPr>
+          <p:cNvPr id="11" name="Speech Bubble: Rectangle 10">
+            <a:extLst>
+              <a:ext uri="{FF2B5EF4-FFF2-40B4-BE49-F238E27FC236}">
+                <a16:creationId xmlns:a16="http://schemas.microsoft.com/office/drawing/2014/main" id="{0C526262-AEF3-14C3-FF2D-906F50BEDA36}"/>
+              </a:ext>
+            </a:extLst>
+          </p:cNvPr>
+          <p:cNvSpPr/>
+          <p:nvPr/>
+        </p:nvSpPr>
+        <p:spPr>
+          <a:xfrm>
+            <a:off x="2188634" y="3959781"/>
+            <a:ext cx="3842174" cy="685803"/>
+          </a:xfrm>
+          <a:prstGeom prst="wedgeRectCallout">
+            <a:avLst>
+              <a:gd name="adj1" fmla="val -80146"/>
+              <a:gd name="adj2" fmla="val -27052"/>
+            </a:avLst>
+          </a:prstGeom>
+          <a:solidFill>
+            <a:schemeClr val="accent6">
+              <a:lumMod val="20000"/>
+              <a:lumOff val="80000"/>
+            </a:schemeClr>
+          </a:solidFill>
+          <a:ln>
+            <a:solidFill>
+              <a:schemeClr val="accent2">
+                <a:lumMod val="40000"/>
+                <a:lumOff val="60000"/>
+              </a:schemeClr>
+            </a:solidFill>
+          </a:ln>
+        </p:spPr>
+        <p:style>
+          <a:lnRef idx="2">
+            <a:schemeClr val="accent1">
+              <a:shade val="15000"/>
+            </a:schemeClr>
+          </a:lnRef>
+          <a:fillRef idx="1">
+            <a:schemeClr val="accent1"/>
+          </a:fillRef>
+          <a:effectRef idx="0">
+            <a:schemeClr val="accent1"/>
+          </a:effectRef>
+          <a:fontRef idx="minor">
+            <a:schemeClr val="lt1"/>
+          </a:fontRef>
+        </p:style>
+        <p:txBody>
+          <a:bodyPr rtlCol="0" anchor="ctr"/>
+          <a:lstStyle/>
+          <a:p>
+            <a:r>
+              <a:rPr lang="en-US" altLang="zh-TW" sz="1100" b="1" dirty="0">
+                <a:solidFill>
+                  <a:schemeClr val="tx1"/>
+                </a:solidFill>
+              </a:rPr>
+              <a:t>Build Model</a:t>
+            </a:r>
+          </a:p>
+          <a:p>
+            <a:pPr algn="just"/>
+            <a:r>
+              <a:rPr lang="en-US" altLang="zh-TW" sz="1000" dirty="0">
+                <a:solidFill>
+                  <a:schemeClr val="tx1"/>
+                </a:solidFill>
+              </a:rPr>
+              <a:t>Click to train the random forest using the selected variables and parameter settings. The dashboard will update with model performance and visualizations.</a:t>
+            </a:r>
+            <a:endParaRPr lang="en-US" altLang="zh-TW" sz="1000" b="1" dirty="0">
+              <a:solidFill>
+                <a:schemeClr val="tx1"/>
+              </a:solidFill>
+            </a:endParaRPr>
+          </a:p>
+        </p:txBody>
+      </p:sp>
+      <p:sp>
+        <p:nvSpPr>
+          <p:cNvPr id="12" name="Speech Bubble: Rectangle 11">
+            <a:extLst>
+              <a:ext uri="{FF2B5EF4-FFF2-40B4-BE49-F238E27FC236}">
+                <a16:creationId xmlns:a16="http://schemas.microsoft.com/office/drawing/2014/main" id="{6B804C02-FE0D-AFC3-1884-505D5F450359}"/>
+              </a:ext>
+            </a:extLst>
+          </p:cNvPr>
+          <p:cNvSpPr/>
+          <p:nvPr/>
+        </p:nvSpPr>
+        <p:spPr>
+          <a:xfrm>
+            <a:off x="2802465" y="5176591"/>
+            <a:ext cx="3156374" cy="685804"/>
+          </a:xfrm>
+          <a:prstGeom prst="wedgeRectCallout">
+            <a:avLst>
+              <a:gd name="adj1" fmla="val -68774"/>
+              <a:gd name="adj2" fmla="val -15940"/>
+            </a:avLst>
+          </a:prstGeom>
+          <a:solidFill>
+            <a:schemeClr val="accent6">
+              <a:lumMod val="20000"/>
+              <a:lumOff val="80000"/>
+            </a:schemeClr>
+          </a:solidFill>
+          <a:ln>
+            <a:solidFill>
+              <a:schemeClr val="accent2">
+                <a:lumMod val="40000"/>
+                <a:lumOff val="60000"/>
+              </a:schemeClr>
+            </a:solidFill>
+          </a:ln>
+        </p:spPr>
+        <p:style>
+          <a:lnRef idx="2">
+            <a:schemeClr val="accent1">
+              <a:shade val="15000"/>
+            </a:schemeClr>
+          </a:lnRef>
+          <a:fillRef idx="1">
+            <a:schemeClr val="accent1"/>
+          </a:fillRef>
+          <a:effectRef idx="0">
+            <a:schemeClr val="accent1"/>
+          </a:effectRef>
+          <a:fontRef idx="minor">
+            <a:schemeClr val="lt1"/>
+          </a:fontRef>
+        </p:style>
+        <p:txBody>
+          <a:bodyPr rtlCol="0" anchor="ctr"/>
+          <a:lstStyle/>
+          <a:p>
+            <a:r>
+              <a:rPr lang="en-US" altLang="zh-TW" sz="1100" b="1" dirty="0">
+                <a:solidFill>
+                  <a:schemeClr val="tx1"/>
+                </a:solidFill>
+              </a:rPr>
+              <a:t>Parameter Explanation</a:t>
+            </a:r>
+          </a:p>
+          <a:p>
+            <a:pPr algn="just"/>
+            <a:r>
+              <a:rPr lang="en-US" altLang="zh-TW" sz="1000" dirty="0">
+                <a:solidFill>
+                  <a:schemeClr val="tx1"/>
+                </a:solidFill>
+              </a:rPr>
+              <a:t>Provide more intuitive text explanations for users on the concepts of Train/Test Split Ratio, Number of Trees.</a:t>
+            </a:r>
+            <a:endParaRPr lang="en-US" altLang="zh-TW" sz="1000" b="1" dirty="0">
+              <a:solidFill>
+                <a:schemeClr val="tx1"/>
+              </a:solidFill>
+            </a:endParaRPr>
+          </a:p>
+        </p:txBody>
+      </p:sp>
+    </p:spTree>
+    <p:extLst>
+      <p:ext uri="{BB962C8B-B14F-4D97-AF65-F5344CB8AC3E}">
+        <p14:creationId xmlns:p14="http://schemas.microsoft.com/office/powerpoint/2010/main" val="3882514257"/>
+      </p:ext>
+    </p:extLst>
+  </p:cSld>
+  <p:clrMapOvr>
+    <a:masterClrMapping/>
+  </p:clrMapOvr>
+</p:sld>
+</file>
+
+<file path=ppt/slides/slide8.xml><?xml version="1.0" encoding="utf-8"?>
+<p:sld xmlns:a="http://schemas.openxmlformats.org/drawingml/2006/main" xmlns:r="http://schemas.openxmlformats.org/officeDocument/2006/relationships" xmlns:p="http://schemas.openxmlformats.org/presentationml/2006/main">
+  <p:cSld>
+    <p:spTree>
+      <p:nvGrpSpPr>
+        <p:cNvPr id="1" name=""/>
+        <p:cNvGrpSpPr/>
+        <p:nvPr/>
+      </p:nvGrpSpPr>
+      <p:grpSpPr>
+        <a:xfrm>
+          <a:off x="0" y="0"/>
+          <a:ext cx="0" cy="0"/>
+          <a:chOff x="0" y="0"/>
+          <a:chExt cx="0" cy="0"/>
+        </a:xfrm>
+      </p:grpSpPr>
+      <p:pic>
+        <p:nvPicPr>
+          <p:cNvPr id="5" name="Picture 4">
+            <a:extLst>
+              <a:ext uri="{FF2B5EF4-FFF2-40B4-BE49-F238E27FC236}">
+                <a16:creationId xmlns:a16="http://schemas.microsoft.com/office/drawing/2014/main" id="{9FA0E970-E412-DFCD-0061-7CA92C47AD64}"/>
+              </a:ext>
+            </a:extLst>
+          </p:cNvPr>
+          <p:cNvPicPr>
+            <a:picLocks noChangeAspect="1"/>
+          </p:cNvPicPr>
+          <p:nvPr/>
+        </p:nvPicPr>
+        <p:blipFill>
+          <a:blip r:embed="rId2"/>
+          <a:stretch>
+            <a:fillRect/>
+          </a:stretch>
+        </p:blipFill>
+        <p:spPr>
+          <a:xfrm>
+            <a:off x="0" y="520346"/>
+            <a:ext cx="12192000" cy="5817307"/>
+          </a:xfrm>
+          <a:prstGeom prst="rect">
+            <a:avLst/>
+          </a:prstGeom>
+        </p:spPr>
+      </p:pic>
+      <p:sp>
+        <p:nvSpPr>
+          <p:cNvPr id="6" name="Speech Bubble: Rectangle 5">
+            <a:extLst>
+              <a:ext uri="{FF2B5EF4-FFF2-40B4-BE49-F238E27FC236}">
+                <a16:creationId xmlns:a16="http://schemas.microsoft.com/office/drawing/2014/main" id="{466412A9-D369-48DE-B1D9-56B1D187922B}"/>
+              </a:ext>
+            </a:extLst>
+          </p:cNvPr>
+          <p:cNvSpPr/>
+          <p:nvPr/>
+        </p:nvSpPr>
+        <p:spPr>
+          <a:xfrm>
+            <a:off x="5564925" y="1172628"/>
+            <a:ext cx="2994876" cy="503773"/>
+          </a:xfrm>
+          <a:prstGeom prst="wedgeRectCallout">
+            <a:avLst>
+              <a:gd name="adj1" fmla="val -64889"/>
+              <a:gd name="adj2" fmla="val 18160"/>
+            </a:avLst>
+          </a:prstGeom>
+          <a:solidFill>
+            <a:schemeClr val="accent2">
+              <a:lumMod val="20000"/>
+              <a:lumOff val="80000"/>
+            </a:schemeClr>
+          </a:solidFill>
+          <a:ln>
+            <a:solidFill>
+              <a:schemeClr val="accent2">
+                <a:lumMod val="40000"/>
+                <a:lumOff val="60000"/>
+              </a:schemeClr>
+            </a:solidFill>
+          </a:ln>
+        </p:spPr>
+        <p:style>
+          <a:lnRef idx="2">
+            <a:schemeClr val="accent1">
+              <a:shade val="15000"/>
+            </a:schemeClr>
+          </a:lnRef>
+          <a:fillRef idx="1">
+            <a:schemeClr val="accent1"/>
+          </a:fillRef>
+          <a:effectRef idx="0">
+            <a:schemeClr val="accent1"/>
+          </a:effectRef>
+          <a:fontRef idx="minor">
+            <a:schemeClr val="lt1"/>
+          </a:fontRef>
+        </p:style>
+        <p:txBody>
+          <a:bodyPr rtlCol="0" anchor="ctr"/>
+          <a:lstStyle/>
+          <a:p>
+            <a:r>
+              <a:rPr lang="en-US" altLang="zh-TW" sz="1100" b="1" dirty="0">
+                <a:solidFill>
+                  <a:schemeClr val="tx1"/>
+                </a:solidFill>
+              </a:rPr>
+              <a:t>Model Performance</a:t>
+            </a:r>
+          </a:p>
+          <a:p>
+            <a:pPr algn="just"/>
+            <a:r>
+              <a:rPr lang="en-US" altLang="zh-TW" sz="1000" dirty="0">
+                <a:solidFill>
+                  <a:schemeClr val="tx1"/>
+                </a:solidFill>
+              </a:rPr>
+              <a:t>Click “Build Model” to automatically calculate RMSE, MAE, and R-squared for model evaluation.</a:t>
+            </a:r>
+            <a:endParaRPr lang="zh-TW" altLang="en-US" sz="1000" dirty="0">
+              <a:solidFill>
+                <a:schemeClr val="tx1"/>
+              </a:solidFill>
+            </a:endParaRPr>
+          </a:p>
+        </p:txBody>
+      </p:sp>
+      <p:sp>
+        <p:nvSpPr>
+          <p:cNvPr id="7" name="Speech Bubble: Rectangle 6">
+            <a:extLst>
+              <a:ext uri="{FF2B5EF4-FFF2-40B4-BE49-F238E27FC236}">
+                <a16:creationId xmlns:a16="http://schemas.microsoft.com/office/drawing/2014/main" id="{9AE539E6-25D0-014E-7029-BD552F0E07DE}"/>
+              </a:ext>
+            </a:extLst>
+          </p:cNvPr>
+          <p:cNvSpPr/>
+          <p:nvPr/>
+        </p:nvSpPr>
+        <p:spPr>
+          <a:xfrm>
+            <a:off x="2942224" y="2597146"/>
+            <a:ext cx="1775675" cy="1189573"/>
+          </a:xfrm>
+          <a:prstGeom prst="wedgeRectCallout">
+            <a:avLst>
+              <a:gd name="adj1" fmla="val -2419"/>
+              <a:gd name="adj2" fmla="val -99647"/>
+            </a:avLst>
+          </a:prstGeom>
+          <a:solidFill>
+            <a:schemeClr val="accent6">
+              <a:lumMod val="20000"/>
+              <a:lumOff val="80000"/>
+            </a:schemeClr>
+          </a:solidFill>
+          <a:ln>
+            <a:solidFill>
+              <a:schemeClr val="accent2">
+                <a:lumMod val="40000"/>
+                <a:lumOff val="60000"/>
+              </a:schemeClr>
+            </a:solidFill>
+          </a:ln>
+        </p:spPr>
+        <p:style>
+          <a:lnRef idx="2">
+            <a:schemeClr val="accent1">
+              <a:shade val="15000"/>
+            </a:schemeClr>
+          </a:lnRef>
+          <a:fillRef idx="1">
+            <a:schemeClr val="accent1"/>
+          </a:fillRef>
+          <a:effectRef idx="0">
+            <a:schemeClr val="accent1"/>
+          </a:effectRef>
+          <a:fontRef idx="minor">
+            <a:schemeClr val="lt1"/>
+          </a:fontRef>
+        </p:style>
+        <p:txBody>
+          <a:bodyPr rtlCol="0" anchor="ctr"/>
+          <a:lstStyle/>
+          <a:p>
+            <a:r>
+              <a:rPr lang="en-US" altLang="zh-TW" sz="1100" b="1" dirty="0">
+                <a:solidFill>
+                  <a:schemeClr val="tx1"/>
+                </a:solidFill>
+              </a:rPr>
+              <a:t>RMSE</a:t>
+            </a:r>
+          </a:p>
+          <a:p>
+            <a:r>
+              <a:rPr lang="en-US" altLang="zh-TW" sz="1000" dirty="0">
+                <a:solidFill>
+                  <a:schemeClr val="tx1"/>
+                </a:solidFill>
+              </a:rPr>
+              <a:t>Measures the overall prediction error, giving more weight to larger errors. Lower values indicate better model performance.</a:t>
+            </a:r>
+            <a:endParaRPr lang="zh-TW" altLang="en-US" sz="1000" dirty="0">
+              <a:solidFill>
+                <a:schemeClr val="tx1"/>
+              </a:solidFill>
+            </a:endParaRPr>
+          </a:p>
+        </p:txBody>
+      </p:sp>
+      <p:sp>
+        <p:nvSpPr>
+          <p:cNvPr id="8" name="Speech Bubble: Rectangle 7">
+            <a:extLst>
+              <a:ext uri="{FF2B5EF4-FFF2-40B4-BE49-F238E27FC236}">
+                <a16:creationId xmlns:a16="http://schemas.microsoft.com/office/drawing/2014/main" id="{06367C44-056C-BD83-4C6A-5A53236B4AE4}"/>
+              </a:ext>
+            </a:extLst>
+          </p:cNvPr>
+          <p:cNvSpPr/>
+          <p:nvPr/>
+        </p:nvSpPr>
+        <p:spPr>
+          <a:xfrm>
+            <a:off x="5094608" y="2597145"/>
+            <a:ext cx="1775675" cy="1189573"/>
+          </a:xfrm>
+          <a:prstGeom prst="wedgeRectCallout">
+            <a:avLst>
+              <a:gd name="adj1" fmla="val -2419"/>
+              <a:gd name="adj2" fmla="val -99647"/>
+            </a:avLst>
+          </a:prstGeom>
+          <a:solidFill>
+            <a:schemeClr val="accent6">
+              <a:lumMod val="20000"/>
+              <a:lumOff val="80000"/>
+            </a:schemeClr>
+          </a:solidFill>
+          <a:ln>
+            <a:solidFill>
+              <a:schemeClr val="accent2">
+                <a:lumMod val="40000"/>
+                <a:lumOff val="60000"/>
+              </a:schemeClr>
+            </a:solidFill>
+          </a:ln>
+        </p:spPr>
+        <p:style>
+          <a:lnRef idx="2">
+            <a:schemeClr val="accent1">
+              <a:shade val="15000"/>
+            </a:schemeClr>
+          </a:lnRef>
+          <a:fillRef idx="1">
+            <a:schemeClr val="accent1"/>
+          </a:fillRef>
+          <a:effectRef idx="0">
+            <a:schemeClr val="accent1"/>
+          </a:effectRef>
+          <a:fontRef idx="minor">
+            <a:schemeClr val="lt1"/>
+          </a:fontRef>
+        </p:style>
+        <p:txBody>
+          <a:bodyPr rtlCol="0" anchor="ctr"/>
+          <a:lstStyle/>
+          <a:p>
+            <a:r>
+              <a:rPr lang="en-US" altLang="zh-TW" sz="1100" b="1" dirty="0">
+                <a:solidFill>
+                  <a:schemeClr val="tx1"/>
+                </a:solidFill>
+              </a:rPr>
+              <a:t>MAE</a:t>
+            </a:r>
+          </a:p>
+          <a:p>
+            <a:r>
+              <a:rPr lang="en-US" altLang="zh-TW" sz="1000" dirty="0">
+                <a:solidFill>
+                  <a:schemeClr val="tx1"/>
+                </a:solidFill>
+              </a:rPr>
+              <a:t>Measures the average absolute difference between predicted and actual values. Lower values indicate more accurate predictions.</a:t>
+            </a:r>
+            <a:endParaRPr lang="zh-TW" altLang="en-US" sz="1000" dirty="0">
+              <a:solidFill>
+                <a:schemeClr val="tx1"/>
+              </a:solidFill>
+            </a:endParaRPr>
+          </a:p>
+        </p:txBody>
+      </p:sp>
+      <p:sp>
+        <p:nvSpPr>
+          <p:cNvPr id="9" name="Speech Bubble: Rectangle 8">
+            <a:extLst>
+              <a:ext uri="{FF2B5EF4-FFF2-40B4-BE49-F238E27FC236}">
+                <a16:creationId xmlns:a16="http://schemas.microsoft.com/office/drawing/2014/main" id="{3D721CE4-AA81-E2BF-6211-036C34BA0B7E}"/>
+              </a:ext>
+            </a:extLst>
+          </p:cNvPr>
+          <p:cNvSpPr/>
+          <p:nvPr/>
+        </p:nvSpPr>
+        <p:spPr>
+          <a:xfrm>
+            <a:off x="6986163" y="2597145"/>
+            <a:ext cx="1775675" cy="994839"/>
+          </a:xfrm>
+          <a:prstGeom prst="wedgeRectCallout">
+            <a:avLst>
+              <a:gd name="adj1" fmla="val -2419"/>
+              <a:gd name="adj2" fmla="val -99647"/>
+            </a:avLst>
+          </a:prstGeom>
+          <a:solidFill>
+            <a:schemeClr val="accent6">
+              <a:lumMod val="20000"/>
+              <a:lumOff val="80000"/>
+            </a:schemeClr>
+          </a:solidFill>
+          <a:ln>
+            <a:solidFill>
+              <a:schemeClr val="accent2">
+                <a:lumMod val="40000"/>
+                <a:lumOff val="60000"/>
+              </a:schemeClr>
+            </a:solidFill>
+          </a:ln>
+        </p:spPr>
+        <p:style>
+          <a:lnRef idx="2">
+            <a:schemeClr val="accent1">
+              <a:shade val="15000"/>
+            </a:schemeClr>
+          </a:lnRef>
+          <a:fillRef idx="1">
+            <a:schemeClr val="accent1"/>
+          </a:fillRef>
+          <a:effectRef idx="0">
+            <a:schemeClr val="accent1"/>
+          </a:effectRef>
+          <a:fontRef idx="minor">
+            <a:schemeClr val="lt1"/>
+          </a:fontRef>
+        </p:style>
+        <p:txBody>
+          <a:bodyPr rtlCol="0" anchor="ctr"/>
+          <a:lstStyle/>
+          <a:p>
+            <a:r>
+              <a:rPr lang="en-US" altLang="zh-TW" sz="1100" b="1" dirty="0">
+                <a:solidFill>
+                  <a:schemeClr val="tx1"/>
+                </a:solidFill>
+              </a:rPr>
+              <a:t>R-squared</a:t>
+            </a:r>
+          </a:p>
+          <a:p>
+            <a:r>
+              <a:rPr lang="en-US" altLang="zh-TW" sz="1000" dirty="0">
+                <a:solidFill>
+                  <a:schemeClr val="tx1"/>
+                </a:solidFill>
+              </a:rPr>
+              <a:t>Shows how well the model explains the variation in the target variable. Values closer to 1 indicate a better fit.</a:t>
+            </a:r>
+            <a:endParaRPr lang="zh-TW" altLang="en-US" sz="1000" dirty="0">
+              <a:solidFill>
+                <a:schemeClr val="tx1"/>
+              </a:solidFill>
+            </a:endParaRPr>
+          </a:p>
+        </p:txBody>
+      </p:sp>
+    </p:spTree>
+    <p:extLst>
+      <p:ext uri="{BB962C8B-B14F-4D97-AF65-F5344CB8AC3E}">
+        <p14:creationId xmlns:p14="http://schemas.microsoft.com/office/powerpoint/2010/main" val="2415657076"/>
+      </p:ext>
+    </p:extLst>
+  </p:cSld>
+  <p:clrMapOvr>
+    <a:masterClrMapping/>
+  </p:clrMapOvr>
+</p:sld>
+</file>
+
+<file path=ppt/slides/slide9.xml><?xml version="1.0" encoding="utf-8"?>
+<p:sld xmlns:a="http://schemas.openxmlformats.org/drawingml/2006/main" xmlns:r="http://schemas.openxmlformats.org/officeDocument/2006/relationships" xmlns:p="http://schemas.openxmlformats.org/presentationml/2006/main">
+  <p:cSld>
+    <p:spTree>
+      <p:nvGrpSpPr>
+        <p:cNvPr id="1" name="">
+          <a:extLst>
+            <a:ext uri="{FF2B5EF4-FFF2-40B4-BE49-F238E27FC236}">
+              <a16:creationId xmlns:a16="http://schemas.microsoft.com/office/drawing/2014/main" id="{1BB58E58-E8F9-9A4C-4E76-1C4379F9F716}"/>
+            </a:ext>
+          </a:extLst>
+        </p:cNvPr>
+        <p:cNvGrpSpPr/>
+        <p:nvPr/>
+      </p:nvGrpSpPr>
+      <p:grpSpPr>
+        <a:xfrm>
+          <a:off x="0" y="0"/>
+          <a:ext cx="0" cy="0"/>
+          <a:chOff x="0" y="0"/>
+          <a:chExt cx="0" cy="0"/>
+        </a:xfrm>
+      </p:grpSpPr>
+      <p:pic>
+        <p:nvPicPr>
+          <p:cNvPr id="5" name="Picture 4">
+            <a:extLst>
+              <a:ext uri="{FF2B5EF4-FFF2-40B4-BE49-F238E27FC236}">
+                <a16:creationId xmlns:a16="http://schemas.microsoft.com/office/drawing/2014/main" id="{9646B927-C728-EEFC-26DD-31A90D958E73}"/>
+              </a:ext>
+            </a:extLst>
+          </p:cNvPr>
+          <p:cNvPicPr>
+            <a:picLocks noChangeAspect="1"/>
+          </p:cNvPicPr>
+          <p:nvPr/>
+        </p:nvPicPr>
+        <p:blipFill>
+          <a:blip r:embed="rId2"/>
+          <a:stretch>
+            <a:fillRect/>
+          </a:stretch>
+        </p:blipFill>
+        <p:spPr>
+          <a:xfrm>
+            <a:off x="0" y="520346"/>
+            <a:ext cx="12192000" cy="5817307"/>
+          </a:xfrm>
+          <a:prstGeom prst="rect">
+            <a:avLst/>
+          </a:prstGeom>
+        </p:spPr>
+      </p:pic>
+      <p:sp>
+        <p:nvSpPr>
+          <p:cNvPr id="2" name="Speech Bubble: Rectangle 1">
+            <a:extLst>
+              <a:ext uri="{FF2B5EF4-FFF2-40B4-BE49-F238E27FC236}">
+                <a16:creationId xmlns:a16="http://schemas.microsoft.com/office/drawing/2014/main" id="{18EE2C6E-9C5A-DDBF-9591-E3854AB55036}"/>
+              </a:ext>
+            </a:extLst>
+          </p:cNvPr>
+          <p:cNvSpPr/>
+          <p:nvPr/>
+        </p:nvSpPr>
+        <p:spPr>
+          <a:xfrm>
+            <a:off x="3329723" y="6176433"/>
+            <a:ext cx="4078610" cy="622300"/>
+          </a:xfrm>
+          <a:prstGeom prst="wedgeRectCallout">
+            <a:avLst>
+              <a:gd name="adj1" fmla="val -4092"/>
+              <a:gd name="adj2" fmla="val -70612"/>
+            </a:avLst>
+          </a:prstGeom>
+          <a:solidFill>
+            <a:schemeClr val="accent6">
+              <a:lumMod val="20000"/>
+              <a:lumOff val="80000"/>
+            </a:schemeClr>
+          </a:solidFill>
+          <a:ln>
+            <a:solidFill>
+              <a:schemeClr val="accent2">
+                <a:lumMod val="40000"/>
+                <a:lumOff val="60000"/>
+              </a:schemeClr>
+            </a:solidFill>
+          </a:ln>
+        </p:spPr>
+        <p:style>
+          <a:lnRef idx="2">
+            <a:schemeClr val="accent1">
+              <a:shade val="15000"/>
+            </a:schemeClr>
+          </a:lnRef>
+          <a:fillRef idx="1">
+            <a:schemeClr val="accent1"/>
+          </a:fillRef>
+          <a:effectRef idx="0">
+            <a:schemeClr val="accent1"/>
+          </a:effectRef>
+          <a:fontRef idx="minor">
+            <a:schemeClr val="lt1"/>
+          </a:fontRef>
+        </p:style>
+        <p:txBody>
+          <a:bodyPr rtlCol="0" anchor="ctr"/>
+          <a:lstStyle/>
+          <a:p>
+            <a:r>
+              <a:rPr lang="en-US" altLang="zh-TW" sz="1100" b="1" dirty="0">
+                <a:solidFill>
+                  <a:schemeClr val="tx1"/>
+                </a:solidFill>
+              </a:rPr>
+              <a:t>Predicted vs Actual on Test Data</a:t>
+            </a:r>
+          </a:p>
+          <a:p>
+            <a:r>
+              <a:rPr lang="en-US" altLang="zh-TW" sz="1000" dirty="0">
+                <a:solidFill>
+                  <a:schemeClr val="tx1"/>
+                </a:solidFill>
+              </a:rPr>
+              <a:t>Compares predicted churn probability with actual churn probability on the test dataset. Points closer to the red diagonal line indicate better prediction accuracy.</a:t>
+            </a:r>
+            <a:endParaRPr lang="zh-TW" altLang="en-US" sz="1000" dirty="0">
+              <a:solidFill>
+                <a:schemeClr val="tx1"/>
+              </a:solidFill>
+            </a:endParaRPr>
+          </a:p>
+        </p:txBody>
+      </p:sp>
+      <p:sp>
+        <p:nvSpPr>
+          <p:cNvPr id="3" name="Speech Bubble: Rectangle 2">
+            <a:extLst>
+              <a:ext uri="{FF2B5EF4-FFF2-40B4-BE49-F238E27FC236}">
+                <a16:creationId xmlns:a16="http://schemas.microsoft.com/office/drawing/2014/main" id="{859DA2D0-9C51-669A-213E-529C8BA589D3}"/>
+              </a:ext>
+            </a:extLst>
+          </p:cNvPr>
+          <p:cNvSpPr/>
+          <p:nvPr/>
+        </p:nvSpPr>
+        <p:spPr>
+          <a:xfrm>
+            <a:off x="7944059" y="6176432"/>
+            <a:ext cx="4163274" cy="622299"/>
+          </a:xfrm>
+          <a:prstGeom prst="wedgeRectCallout">
+            <a:avLst>
+              <a:gd name="adj1" fmla="val -1946"/>
+              <a:gd name="adj2" fmla="val -86839"/>
+            </a:avLst>
+          </a:prstGeom>
+          <a:solidFill>
+            <a:schemeClr val="accent6">
+              <a:lumMod val="20000"/>
+              <a:lumOff val="80000"/>
+            </a:schemeClr>
+          </a:solidFill>
+          <a:ln>
+            <a:solidFill>
+              <a:schemeClr val="accent2">
+                <a:lumMod val="40000"/>
+                <a:lumOff val="60000"/>
+              </a:schemeClr>
+            </a:solidFill>
+          </a:ln>
+        </p:spPr>
+        <p:style>
+          <a:lnRef idx="2">
+            <a:schemeClr val="accent1">
+              <a:shade val="15000"/>
+            </a:schemeClr>
+          </a:lnRef>
+          <a:fillRef idx="1">
+            <a:schemeClr val="accent1"/>
+          </a:fillRef>
+          <a:effectRef idx="0">
+            <a:schemeClr val="accent1"/>
+          </a:effectRef>
+          <a:fontRef idx="minor">
+            <a:schemeClr val="lt1"/>
+          </a:fontRef>
+        </p:style>
+        <p:txBody>
+          <a:bodyPr rtlCol="0" anchor="ctr"/>
+          <a:lstStyle/>
+          <a:p>
+            <a:r>
+              <a:rPr lang="en-US" altLang="zh-TW" sz="1100" b="1" dirty="0">
+                <a:solidFill>
+                  <a:schemeClr val="tx1"/>
+                </a:solidFill>
+              </a:rPr>
+              <a:t>Feature Importance of Decision Tree</a:t>
+            </a:r>
+          </a:p>
+          <a:p>
+            <a:r>
+              <a:rPr lang="en-US" altLang="zh-TW" sz="1000" dirty="0">
+                <a:solidFill>
+                  <a:schemeClr val="tx1"/>
+                </a:solidFill>
+              </a:rPr>
+              <a:t>Shows the top 10 most important variables used in the random forest. Higher values indicate that a variable contributes more to the model’s predictions.</a:t>
+            </a:r>
+            <a:endParaRPr lang="zh-TW" altLang="en-US" sz="1000" dirty="0">
+              <a:solidFill>
+                <a:schemeClr val="tx1"/>
+              </a:solidFill>
+            </a:endParaRPr>
+          </a:p>
+        </p:txBody>
+      </p:sp>
+      <p:sp>
+        <p:nvSpPr>
+          <p:cNvPr id="4" name="Speech Bubble: Rectangle 3">
+            <a:extLst>
+              <a:ext uri="{FF2B5EF4-FFF2-40B4-BE49-F238E27FC236}">
+                <a16:creationId xmlns:a16="http://schemas.microsoft.com/office/drawing/2014/main" id="{CF68F5A3-7BF8-677D-204E-9B27675CAD60}"/>
+              </a:ext>
+            </a:extLst>
+          </p:cNvPr>
+          <p:cNvSpPr/>
+          <p:nvPr/>
+        </p:nvSpPr>
+        <p:spPr>
+          <a:xfrm>
+            <a:off x="5287848" y="2355852"/>
+            <a:ext cx="2994876" cy="812800"/>
+          </a:xfrm>
+          <a:prstGeom prst="wedgeRectCallout">
+            <a:avLst>
+              <a:gd name="adj1" fmla="val -73371"/>
+              <a:gd name="adj2" fmla="val 20500"/>
+            </a:avLst>
+          </a:prstGeom>
+          <a:solidFill>
+            <a:schemeClr val="accent2">
+              <a:lumMod val="20000"/>
+              <a:lumOff val="80000"/>
+            </a:schemeClr>
+          </a:solidFill>
+          <a:ln>
+            <a:solidFill>
+              <a:schemeClr val="accent2">
+                <a:lumMod val="40000"/>
+                <a:lumOff val="60000"/>
+              </a:schemeClr>
+            </a:solidFill>
+          </a:ln>
+        </p:spPr>
+        <p:style>
+          <a:lnRef idx="2">
+            <a:schemeClr val="accent1">
+              <a:shade val="15000"/>
+            </a:schemeClr>
+          </a:lnRef>
+          <a:fillRef idx="1">
+            <a:schemeClr val="accent1"/>
+          </a:fillRef>
+          <a:effectRef idx="0">
+            <a:schemeClr val="accent1"/>
+          </a:effectRef>
+          <a:fontRef idx="minor">
+            <a:schemeClr val="lt1"/>
+          </a:fontRef>
+        </p:style>
+        <p:txBody>
+          <a:bodyPr rtlCol="0" anchor="ctr"/>
+          <a:lstStyle/>
+          <a:p>
+            <a:r>
+              <a:rPr lang="en-US" altLang="zh-TW" sz="1100" b="1" dirty="0">
+                <a:solidFill>
+                  <a:schemeClr val="tx1"/>
+                </a:solidFill>
+              </a:rPr>
+              <a:t>Model Visualization</a:t>
+            </a:r>
+          </a:p>
+          <a:p>
+            <a:r>
+              <a:rPr lang="en-US" altLang="zh-TW" sz="1000" dirty="0">
+                <a:solidFill>
+                  <a:schemeClr val="tx1"/>
+                </a:solidFill>
+              </a:rPr>
+              <a:t>Displays the trained random forest, prediction accuracy on test data, and the relative importance of model features.</a:t>
+            </a:r>
+            <a:endParaRPr lang="zh-TW" altLang="en-US" sz="1000" dirty="0">
+              <a:solidFill>
+                <a:schemeClr val="tx1"/>
+              </a:solidFill>
+            </a:endParaRPr>
+          </a:p>
+        </p:txBody>
+      </p:sp>
+    </p:spTree>
+    <p:extLst>
+      <p:ext uri="{BB962C8B-B14F-4D97-AF65-F5344CB8AC3E}">
+        <p14:creationId xmlns:p14="http://schemas.microsoft.com/office/powerpoint/2010/main" val="124127260"/>
       </p:ext>
     </p:extLst>
   </p:cSld>
